--- a/docs/BAO-CAO-slide.pptx
+++ b/docs/BAO-CAO-slide.pptx
@@ -152,7 +152,7 @@
             </a:pPr>
             <a:r>
               <a:rPr lang="vi-VN" sz="1400" b="0" dirty="0"/>
-              <a:t>RQ1 ba họ mô hình · RQ2 đặc trưng quyết định · RQ3 công ty chưa từng thấy · RQ4 định nghĩa nhãn</a:t>
+              <a:t>RQ1 bốn họ mô hình · RQ2 đặc trưng quyết định · RQ3 công ty chưa từng thấy · RQ4 định nghĩa nhãn</a:t>
             </a:r>
           </a:p>
         </p:txBody>
@@ -370,16 +370,25 @@
             </a:pPr>
             <a:r>
               <a:rPr lang="vi-VN" sz="1400" b="0" dirty="0"/>
-              <a:t>Permutation importance: nhóm cấu trúc vốn/thanh khoản dẫn đầu</a:t>
-            </a:r>
-          </a:p>
-          <a:p>
-            <a:pPr marL="228600" indent="-228600">
-              <a:buChar char="•"/>
-            </a:pPr>
-            <a:r>
-              <a:rPr lang="vi-VN" sz="1400" b="0" dirty="0"/>
-              <a:t>Nhiều cột VIF &gt; 10 ⇒ không diễn giải hệ số Logistic như quan hệ nhân quả</a:t>
+              <a:t>Permutation importance (mô hình RF): gross_margin_latest, receivables_to_sales_latest, working_capital_to_assets dẫn đầu</a:t>
+            </a:r>
+          </a:p>
+          <a:p>
+            <a:pPr marL="228600" indent="-228600">
+              <a:buChar char="•"/>
+            </a:pPr>
+            <a:r>
+              <a:rPr lang="vi-VN" sz="1400" b="0" dirty="0"/>
+              <a:t>ΔAUROC rất nhỏ (max 0.008) ⇒ không có 'cột quyết định'</a:t>
+            </a:r>
+          </a:p>
+          <a:p>
+            <a:pPr marL="228600" indent="-228600">
+              <a:buChar char="•"/>
+            </a:pPr>
+            <a:r>
+              <a:rPr lang="vi-VN" sz="1400" b="0" dirty="0"/>
+              <a:t>Nhiều cột VIF &gt; 10 (33) ⇒ không diễn giải hệ số Logistic như quan hệ nhân quả</a:t>
             </a:r>
           </a:p>
           <a:p>
@@ -766,7 +775,16 @@
             </a:pPr>
             <a:r>
               <a:rPr lang="vi-VN" sz="1400" b="0" dirty="0"/>
-              <a:t>Cross-company AUROC còn 0.933; LOCO chỉ tính được AUROC trên 8/8 công ty (nhãn đơn lớp ở phần còn lại)</a:t>
+              <a:t>Cross-company AUROC còn 0.933;</a:t>
+            </a:r>
+          </a:p>
+          <a:p>
+            <a:pPr marL="228600" indent="-228600">
+              <a:buChar char="•"/>
+            </a:pPr>
+            <a:r>
+              <a:rPr lang="vi-VN" sz="1400" b="0" dirty="0"/>
+              <a:t>LOCO tính được AUROC trên cả 8/8 công ty (trung bình 0.610)</a:t>
             </a:r>
           </a:p>
           <a:p>
@@ -1404,6 +1422,15 @@
             <a:r>
               <a:rPr lang="vi-VN" sz="1400" b="0" dirty="0"/>
               <a:t>Chọn mô hình: AP cross-company (GroupKFold) → best-F1(val) → AP → AUROC → gap nhỏ nhất</a:t>
+            </a:r>
+          </a:p>
+          <a:p>
+            <a:pPr marL="228600" indent="-228600">
+              <a:buChar char="•"/>
+            </a:pPr>
+            <a:r>
+              <a:rPr lang="vi-VN" sz="1400" b="0" dirty="0"/>
+              <a:t>Mô hình TRIỂN KHAI giữ cấu hình MẶC ĐỊNH (tinh chỉnh chỉ +0,003 CV-AP ⇒ dưới mức nhiễu)</a:t>
             </a:r>
           </a:p>
         </p:txBody>

--- a/docs/BAO-CAO-slide.pptx
+++ b/docs/BAO-CAO-slide.pptx
@@ -152,7 +152,7 @@
             </a:pPr>
             <a:r>
               <a:rPr lang="vi-VN" sz="1400" b="0" dirty="0"/>
-              <a:t>RQ1 bốn họ mô hình · RQ2 đặc trưng quyết định · RQ3 công ty chưa từng thấy · RQ4 định nghĩa nhãn</a:t>
+              <a:t>RQ1 ba họ mô hình · RQ2 đặc trưng quyết định · RQ3 công ty chưa từng thấy · RQ4 định nghĩa nhãn</a:t>
             </a:r>
           </a:p>
         </p:txBody>
@@ -784,7 +784,7 @@
             </a:pPr>
             <a:r>
               <a:rPr lang="vi-VN" sz="1400" b="0" dirty="0"/>
-              <a:t>LOCO tính được AUROC trên cả 8/8 công ty (trung bình 0.610)</a:t>
+              <a:t>LOCO chỉ tính được AUROC trên 6/8 công ty (nhãn đơn lớp ở phần còn lại)</a:t>
             </a:r>
           </a:p>
           <a:p>
@@ -1371,7 +1371,7 @@
             </a:pPr>
             <a:r>
               <a:rPr lang="vi-VN" sz="2400" b="1" dirty="0"/>
-              <a:t>Các họ mô hình và tinh chỉnh</a:t>
+              <a:t>Ba họ mô hình và tinh chỉnh</a:t>
             </a:r>
           </a:p>
         </p:txBody>
@@ -1403,7 +1403,7 @@
             </a:pPr>
             <a:r>
               <a:rPr lang="vi-VN" sz="1400" b="0" dirty="0"/>
-              <a:t>Logistic · Random Forest · HistGradientBoosting · LightGBM (XGBoost bị bỏ do xung đột phiên bản)</a:t>
+              <a:t>Logistic Regression · Random Forest · HistGradientBoosting (3 họ, thuần scikit-learn)</a:t>
             </a:r>
           </a:p>
           <a:p>

--- a/docs/BAO-CAO-slide.pptx
+++ b/docs/BAO-CAO-slide.pptx
@@ -152,7 +152,7 @@
             </a:pPr>
             <a:r>
               <a:rPr lang="vi-VN" sz="1400" b="0" dirty="0"/>
-              <a:t>RQ1 ba họ mô hình · RQ2 đặc trưng quyết định · RQ3 công ty chưa từng thấy · RQ4 định nghĩa nhãn</a:t>
+              <a:t>RQ1 bốn họ mô hình + baseline quy tắc Altman · RQ2 đặc trưng quyết định · RQ3 công ty chưa từng thấy · RQ4 định nghĩa nhãn</a:t>
             </a:r>
           </a:p>
         </p:txBody>
@@ -241,7 +241,7 @@
             </a:pPr>
             <a:r>
               <a:rPr lang="vi-VN" sz="1400" b="0" dirty="0"/>
-              <a:t>AUROC train tới 1.000 nhưng validation 0.965–0.974 ⇒ overfit nhẹ do dữ liệu nhỏ</a:t>
+              <a:t>AUROC train tới 1.000 nhưng validation 0.965–0.987 ⇒ overfit nhẹ do dữ liệu nhỏ</a:t>
             </a:r>
           </a:p>
           <a:p>
@@ -784,7 +784,7 @@
             </a:pPr>
             <a:r>
               <a:rPr lang="vi-VN" sz="1400" b="0" dirty="0"/>
-              <a:t>LOCO chỉ tính được AUROC trên 6/8 công ty (nhãn đơn lớp ở phần còn lại)</a:t>
+              <a:t>LOCO tính được AUROC trên cả 8/8 công ty (trung bình 0.628)</a:t>
             </a:r>
           </a:p>
           <a:p>
@@ -1371,7 +1371,7 @@
             </a:pPr>
             <a:r>
               <a:rPr lang="vi-VN" sz="2400" b="1" dirty="0"/>
-              <a:t>Ba họ mô hình và tinh chỉnh</a:t>
+              <a:t>Bốn họ mô hình và tinh chỉnh</a:t>
             </a:r>
           </a:p>
         </p:txBody>
@@ -1403,7 +1403,16 @@
             </a:pPr>
             <a:r>
               <a:rPr lang="vi-VN" sz="1400" b="0" dirty="0"/>
-              <a:t>Logistic Regression · Random Forest · HistGradientBoosting (3 họ, thuần scikit-learn)</a:t>
+              <a:t>Logistic Regression · Random Forest · HistGradientBoosting · MLP (4 họ, thuần scikit-learn)</a:t>
+            </a:r>
+          </a:p>
+          <a:p>
+            <a:pPr marL="228600" indent="-228600">
+              <a:buChar char="•"/>
+            </a:pPr>
+            <a:r>
+              <a:rPr lang="vi-VN" sz="1400" b="0" dirty="0"/>
+              <a:t>Baseline quy tắc Altman Z'' &lt; 1,1 (không học tham số) + ticker-prior + dummy + 1 chỉ tiêu</a:t>
             </a:r>
           </a:p>
           <a:p>
